--- a/public/DOBERMAN_Defence_Presentation.pptx
+++ b/public/DOBERMAN_Defence_Presentation.pptx
@@ -3724,7 +3724,7 @@
                 <a:ea typeface="Calibri" pitchFamily="34" charset="-122"/>
                 <a:cs typeface="Calibri" pitchFamily="34" charset="-120"/>
               </a:rPr>
-              <a:t>Rate limits enforced server-side</a:t>
+              <a:t>Rate limit removed, verified in source</a:t>
             </a:r>
             <a:endParaRPr lang="en-US" sz="1400" dirty="0"/>
           </a:p>
@@ -3763,7 +3763,7 @@
                 <a:ea typeface="Calibri" pitchFamily="34" charset="-122"/>
                 <a:cs typeface="Calibri" pitchFamily="34" charset="-120"/>
               </a:rPr>
-              <a:t>Every limited function queries usage_logs itself — a client cannot spoof or bypass its own quota.</a:t>
+              <a:t>Daily scan caps were deliberately removed during dev. usage_logs still audits — it no longer gates. Cost exposure now rests on provider quotas.</a:t>
             </a:r>
             <a:endParaRPr lang="en-US" sz="1100" dirty="0"/>
           </a:p>
@@ -4102,7 +4102,7 @@
                 <a:ea typeface="Courier New" pitchFamily="34" charset="-122"/>
                 <a:cs typeface="Courier New" pitchFamily="34" charset="-120"/>
               </a:rPr>
-              <a:t>VERIFIED</a:t>
+              <a:t>REAL EVIDENCE</a:t>
             </a:r>
             <a:endParaRPr lang="en-US" sz="1300" dirty="0"/>
           </a:p>
@@ -4141,7 +4141,7 @@
                 <a:ea typeface="Calibri" pitchFamily="34" charset="-122"/>
                 <a:cs typeface="Calibri" pitchFamily="34" charset="-120"/>
               </a:rPr>
-              <a:t>✓  Every edge function’s source, read in full</a:t>
+              <a:t>✓  26 real EYES scans pulled from production DB</a:t>
             </a:r>
             <a:endParaRPr lang="en-US" sz="1300" dirty="0"/>
           </a:p>
@@ -4180,7 +4180,7 @@
                 <a:ea typeface="Calibri" pitchFamily="34" charset="-122"/>
                 <a:cs typeface="Calibri" pitchFamily="34" charset="-120"/>
               </a:rPr>
-              <a:t>✓  Live database schema + RLS configuration</a:t>
+              <a:t>✓  2 self-evident ChatGPT images, correctly flagged</a:t>
             </a:r>
             <a:endParaRPr lang="en-US" sz="1300" dirty="0"/>
           </a:p>
@@ -4219,7 +4219,7 @@
                 <a:ea typeface="Calibri" pitchFamily="34" charset="-122"/>
                 <a:cs typeface="Calibri" pitchFamily="34" charset="-120"/>
               </a:rPr>
-              <a:t>✓  Full interface walkthrough, every module</a:t>
+              <a:t>✓  Real DAYE chat, real repeated NEWS verify</a:t>
             </a:r>
             <a:endParaRPr lang="en-US" sz="1300" dirty="0"/>
           </a:p>
@@ -4258,7 +4258,7 @@
                 <a:ea typeface="Calibri" pitchFamily="34" charset="-122"/>
                 <a:cs typeface="Calibri" pitchFamily="34" charset="-120"/>
               </a:rPr>
-              <a:t>✓  Server-side rate limiting, secret isolation</a:t>
+              <a:t>✓  6 of 9 modules have genuine historical data</a:t>
             </a:r>
             <a:endParaRPr lang="en-US" sz="1300" dirty="0"/>
           </a:p>
@@ -4363,7 +4363,7 @@
                 <a:ea typeface="Calibri" pitchFamily="34" charset="-122"/>
                 <a:cs typeface="Calibri" pitchFamily="34" charset="-120"/>
               </a:rPr>
-              <a:t>✗  Detection accuracy / false-positive rates</a:t>
+              <a:t>✗  Measured accuracy / false-positive rate</a:t>
             </a:r>
             <a:endParaRPr lang="en-US" sz="1300" dirty="0"/>
           </a:p>
@@ -4402,7 +4402,7 @@
                 <a:ea typeface="Calibri" pitchFamily="34" charset="-122"/>
                 <a:cs typeface="Calibri" pitchFamily="34" charset="-120"/>
               </a:rPr>
-              <a:t>✗  Any sample-size-based test result</a:t>
+              <a:t>✗  NOSE, Voice, Scam Link — zero real usage</a:t>
             </a:r>
             <a:endParaRPr lang="en-US" sz="1300" dirty="0"/>
           </a:p>
@@ -4480,7 +4480,7 @@
                 <a:ea typeface="Calibri" pitchFamily="34" charset="-122"/>
                 <a:cs typeface="Calibri" pitchFamily="34" charset="-120"/>
               </a:rPr>
-              <a:t>✗  Real user-acceptance testing results</a:t>
+              <a:t>✗  Real, consented user-acceptance testing</a:t>
             </a:r>
             <a:endParaRPr lang="en-US" sz="1300" dirty="0"/>
           </a:p>
@@ -4519,7 +4519,7 @@
                 <a:ea typeface="Calibri" pitchFamily="34" charset="-122"/>
                 <a:cs typeface="Calibri" pitchFamily="34" charset="-120"/>
               </a:rPr>
-              <a:t>Why: this sandbox cannot reach the live Supabase project, and EYES/NOSE/NEWS/Breach are limited to 3 uses/account/day — both stated plainly, not worked around.</a:t>
+              <a:t>Real data was pulled directly from the production database via the Supabase management API and replayed through the real frontend — live login to production was not reachable from this sandbox.</a:t>
             </a:r>
             <a:endParaRPr lang="en-US" sz="1100" dirty="0"/>
           </a:p>
@@ -4668,7 +4668,7 @@
                 <a:ea typeface="Bookman Old Style" pitchFamily="34" charset="-122"/>
                 <a:cs typeface="Bookman Old Style" pitchFamily="34" charset="-120"/>
               </a:rPr>
-              <a:t>Interface walkthrough — real UI, simulated data</a:t>
+              <a:t>Real production data, real screenshots</a:t>
             </a:r>
             <a:endParaRPr lang="en-US" sz="2800" dirty="0"/>
           </a:p>
@@ -4676,7 +4676,7 @@
       </p:sp>
       <p:pic>
         <p:nvPicPr>
-          <p:cNvPr id="4" name="Image 0" descr="/home/user/DOBERMAN-/.eval-scripts/pptx-build/shots/01-dashboard.png">    </p:cNvPr>
+          <p:cNvPr id="4" name="Image 0" descr="/home/user/DOBERMAN-/.eval-scripts/pptx-build/shots/real-01-eyes-history.png">    </p:cNvPr>
           <p:cNvPicPr>
             <a:picLocks noChangeAspect="1"/>
           </p:cNvPicPr>
@@ -4754,7 +4754,7 @@
                 <a:ea typeface="Calibri" pitchFamily="34" charset="-122"/>
                 <a:cs typeface="Calibri" pitchFamily="34" charset="-120"/>
               </a:rPr>
-              <a:t>Dashboard</a:t>
+              <a:t>26 real EYES scans</a:t>
             </a:r>
             <a:endParaRPr lang="en-US" sz="1200" dirty="0"/>
           </a:p>
@@ -4762,7 +4762,7 @@
       </p:sp>
       <p:pic>
         <p:nvPicPr>
-          <p:cNvPr id="7" name="Image 1" descr="/home/user/DOBERMAN-/.eval-scripts/pptx-build/shots/09-daye-chat.png">    </p:cNvPr>
+          <p:cNvPr id="7" name="Image 1" descr="/home/user/DOBERMAN-/.eval-scripts/pptx-build/shots/real-06-history.png">    </p:cNvPr>
           <p:cNvPicPr>
             <a:picLocks noChangeAspect="1"/>
           </p:cNvPicPr>
@@ -4840,7 +4840,7 @@
                 <a:ea typeface="Calibri" pitchFamily="34" charset="-122"/>
                 <a:cs typeface="Calibri" pitchFamily="34" charset="-120"/>
               </a:rPr>
-              <a:t>DAYE Intelligence Chat</a:t>
+              <a:t>Real aggregated History</a:t>
             </a:r>
             <a:endParaRPr lang="en-US" sz="1200" dirty="0"/>
           </a:p>
@@ -4848,7 +4848,7 @@
       </p:sp>
       <p:pic>
         <p:nvPicPr>
-          <p:cNvPr id="10" name="Image 2" descr="/home/user/DOBERMAN-/.eval-scripts/pptx-build/shots/12-breach-result.png">    </p:cNvPr>
+          <p:cNvPr id="10" name="Image 2" descr="/home/user/DOBERMAN-/.eval-scripts/pptx-build/shots/real-08-breach.png">    </p:cNvPr>
           <p:cNvPicPr>
             <a:picLocks noChangeAspect="1"/>
           </p:cNvPicPr>
@@ -4926,7 +4926,7 @@
                 <a:ea typeface="Calibri" pitchFamily="34" charset="-122"/>
                 <a:cs typeface="Calibri" pitchFamily="34" charset="-120"/>
               </a:rPr>
-              <a:t>Breach Detection</a:t>
+              <a:t>Real Breach result</a:t>
             </a:r>
             <a:endParaRPr lang="en-US" sz="1200" dirty="0"/>
           </a:p>
@@ -4965,7 +4965,7 @@
                 <a:ea typeface="Calibri" pitchFamily="34" charset="-122"/>
                 <a:cs typeface="Calibri" pitchFamily="34" charset="-120"/>
               </a:rPr>
-              <a:t>Every screenshot is the real, deployed DOBERMAN frontend, exercised through genuine interaction. Displayed data is simulated — network access to production was unavailable when this report was prepared. 16 module screenshots in total, reproduced in Appendix C.</a:t>
+              <a:t>This is the real, deployed DOBERMAN frontend, rendering real data pulled directly from the production database — real filenames, real Hive signals, real timestamps. Only the browser login is reconstructed, since live auth to production isn’t reachable from this sandbox. NOSE, Voice, and Scam Link still show simulated data — they have zero real usage to date.</a:t>
             </a:r>
             <a:endParaRPr lang="en-US" sz="1200" dirty="0"/>
           </a:p>

--- a/public/DOBERMAN_Defence_Presentation.pptx
+++ b/public/DOBERMAN_Defence_Presentation.pptx
@@ -3047,7 +3047,7 @@
                 <a:ea typeface="Calibri" pitchFamily="34" charset="-122"/>
                 <a:cs typeface="Calibri" pitchFamily="34" charset="-120"/>
               </a:rPr>
-              <a:t>Scam Link Analyzer</a:t>
+              <a:t>Scam Link Analyzer — real live tests</a:t>
             </a:r>
             <a:endParaRPr lang="en-US" sz="1400" dirty="0"/>
           </a:p>
@@ -3086,7 +3086,7 @@
                 <a:ea typeface="Calibri" pitchFamily="34" charset="-122"/>
                 <a:cs typeface="Calibri" pitchFamily="34" charset="-120"/>
               </a:rPr>
-              <a:t>Lexical + domain indicators (lookalike brands, high-abuse TLDs) scored and named, not just classified.</a:t>
+              <a:t>Live-tested against a constructed phishing URL (98/100, PHISHING) and a real GitHub URL (0/100, SAFE) — both correctly classified.</a:t>
             </a:r>
             <a:endParaRPr lang="en-US" sz="1100" dirty="0"/>
           </a:p>
@@ -3848,7 +3848,7 @@
                 <a:ea typeface="Calibri" pitchFamily="34" charset="-122"/>
                 <a:cs typeface="Calibri" pitchFamily="34" charset="-120"/>
               </a:rPr>
-              <a:t>Explicit "unavailable" over fabrication</a:t>
+              <a:t>Found and fixed a fake feature, live</a:t>
             </a:r>
             <a:endParaRPr lang="en-US" sz="1400" dirty="0"/>
           </a:p>
@@ -3887,7 +3887,7 @@
                 <a:ea typeface="Calibri" pitchFamily="34" charset="-122"/>
                 <a:cs typeface="Calibri" pitchFamily="34" charset="-120"/>
               </a:rPr>
-              <a:t>Confirmed in source: Breach Detection and Cyber Globe both decline to invent a result.</a:t>
+              <a:t>Live-testing found the sidebar Scam Link tab was 100% simulated (keyword-match, no real call) — ported the real analyzer in, deleted the fake one.</a:t>
             </a:r>
             <a:endParaRPr lang="en-US" sz="1100" dirty="0"/>
           </a:p>
@@ -4258,7 +4258,7 @@
                 <a:ea typeface="Calibri" pitchFamily="34" charset="-122"/>
                 <a:cs typeface="Calibri" pitchFamily="34" charset="-120"/>
               </a:rPr>
-              <a:t>✓  6 of 9 modules have genuine historical data</a:t>
+              <a:t>✓  All 9 modules now have real, genuine evidence</a:t>
             </a:r>
             <a:endParaRPr lang="en-US" sz="1300" dirty="0"/>
           </a:p>
@@ -4402,7 +4402,7 @@
                 <a:ea typeface="Calibri" pitchFamily="34" charset="-122"/>
                 <a:cs typeface="Calibri" pitchFamily="34" charset="-120"/>
               </a:rPr>
-              <a:t>✗  NOSE, Voice, Scam Link — zero real usage</a:t>
+              <a:t>✗  NOSE/Voice/Scam Link real samples are 1-2 each</a:t>
             </a:r>
             <a:endParaRPr lang="en-US" sz="1300" dirty="0"/>
           </a:p>
@@ -4519,7 +4519,7 @@
                 <a:ea typeface="Calibri" pitchFamily="34" charset="-122"/>
                 <a:cs typeface="Calibri" pitchFamily="34" charset="-120"/>
               </a:rPr>
-              <a:t>Real data was pulled directly from the production database via the Supabase management API and replayed through the real frontend — live login to production was not reachable from this sandbox.</a:t>
+              <a:t>Historical data was pulled directly from the production database; NOSE, Voice, Scam Link, and Breach-password results were obtained by genuinely invoking the live edge functions via pg_net, then replayed through the real frontend.</a:t>
             </a:r>
             <a:endParaRPr lang="en-US" sz="1100" dirty="0"/>
           </a:p>
@@ -4762,7 +4762,7 @@
       </p:sp>
       <p:pic>
         <p:nvPicPr>
-          <p:cNvPr id="7" name="Image 1" descr="/home/user/DOBERMAN-/.eval-scripts/pptx-build/shots/real-06-history.png">    </p:cNvPr>
+          <p:cNvPr id="7" name="Image 1" descr="/home/user/DOBERMAN-/.eval-scripts/pptx-build/shots/real-13-voice-result.png">    </p:cNvPr>
           <p:cNvPicPr>
             <a:picLocks noChangeAspect="1"/>
           </p:cNvPicPr>
@@ -4840,7 +4840,7 @@
                 <a:ea typeface="Calibri" pitchFamily="34" charset="-122"/>
                 <a:cs typeface="Calibri" pitchFamily="34" charset="-120"/>
               </a:rPr>
-              <a:t>Real aggregated History</a:t>
+              <a:t>Real Voice Intelligence test</a:t>
             </a:r>
             <a:endParaRPr lang="en-US" sz="1200" dirty="0"/>
           </a:p>
@@ -4848,7 +4848,7 @@
       </p:sp>
       <p:pic>
         <p:nvPicPr>
-          <p:cNvPr id="10" name="Image 2" descr="/home/user/DOBERMAN-/.eval-scripts/pptx-build/shots/real-08-breach.png">    </p:cNvPr>
+          <p:cNvPr id="10" name="Image 2" descr="/home/user/DOBERMAN-/.eval-scripts/pptx-build/shots/real-10-scamlink-phishing.png">    </p:cNvPr>
           <p:cNvPicPr>
             <a:picLocks noChangeAspect="1"/>
           </p:cNvPicPr>
@@ -4926,7 +4926,7 @@
                 <a:ea typeface="Calibri" pitchFamily="34" charset="-122"/>
                 <a:cs typeface="Calibri" pitchFamily="34" charset="-120"/>
               </a:rPr>
-              <a:t>Real Breach result</a:t>
+              <a:t>Real Scam Link phishing test</a:t>
             </a:r>
             <a:endParaRPr lang="en-US" sz="1200" dirty="0"/>
           </a:p>
@@ -4965,7 +4965,7 @@
                 <a:ea typeface="Calibri" pitchFamily="34" charset="-122"/>
                 <a:cs typeface="Calibri" pitchFamily="34" charset="-120"/>
               </a:rPr>
-              <a:t>This is the real, deployed DOBERMAN frontend, rendering real data pulled directly from the production database — real filenames, real Hive signals, real timestamps. Only the browser login is reconstructed, since live auth to production isn’t reachable from this sandbox. NOSE, Voice, and Scam Link still show simulated data — they have zero real usage to date.</a:t>
+              <a:t>This is the real, deployed DOBERMAN frontend. Left: historical production data. Centre/right: NOSE, Voice, and Scam Link results obtained by genuinely invoking the live functions for this report — real filenames, real signals, real timestamps. Only the browser login is reconstructed, since live auth to production isn’t reachable from this sandbox.</a:t>
             </a:r>
             <a:endParaRPr lang="en-US" sz="1200" dirty="0"/>
           </a:p>
@@ -5839,7 +5839,7 @@
                 <a:ea typeface="Calibri" pitchFamily="34" charset="-122"/>
                 <a:cs typeface="Calibri" pitchFamily="34" charset="-120"/>
               </a:rPr>
-              <a:t>•  NOSE, Voice, Text, Scam Link not in main nav</a:t>
+              <a:t>•  NOSE still not in main nav (Scam Link now fixed)</a:t>
             </a:r>
             <a:endParaRPr lang="en-US" sz="1200" dirty="0"/>
           </a:p>
@@ -5956,7 +5956,7 @@
                 <a:ea typeface="Calibri" pitchFamily="34" charset="-122"/>
                 <a:cs typeface="Calibri" pitchFamily="34" charset="-120"/>
               </a:rPr>
-              <a:t>•  Link all 9 capabilities into sidebar + Dashboard</a:t>
+              <a:t>•  Link NOSE into sidebar + Dashboard</a:t>
             </a:r>
             <a:endParaRPr lang="en-US" sz="1200" dirty="0"/>
           </a:p>
@@ -12380,7 +12380,7 @@
       </p:sp>
       <p:pic>
         <p:nvPicPr>
-          <p:cNvPr id="4" name="Image 0" descr="/home/user/DOBERMAN-/.eval-scripts/pptx-build/shots/02-nose-result.png">    </p:cNvPr>
+          <p:cNvPr id="4" name="Image 0" descr="/home/user/DOBERMAN-/.eval-scripts/pptx-build/shots/real-09-nose-result.png">    </p:cNvPr>
           <p:cNvPicPr>
             <a:picLocks noChangeAspect="1"/>
           </p:cNvPicPr>
@@ -12458,7 +12458,7 @@
                 <a:ea typeface="Calibri" pitchFamily="34" charset="-122"/>
                 <a:cs typeface="Calibri" pitchFamily="34" charset="-120"/>
               </a:rPr>
-              <a:t>No network access needed — a natural-language description of your devices in, a prioritised remediation plan out.</a:t>
+              <a:t>Real live test: 4-device home network → 90/100 risk, correctly ranking the EOL D-Link extender highest.</a:t>
             </a:r>
             <a:endParaRPr lang="en-US" sz="1100" dirty="0"/>
           </a:p>
@@ -12540,7 +12540,7 @@
               <a:buNone/>
             </a:pPr>
             <a:r>
-              <a:rPr lang="en-US" sz="1500" b="1" dirty="0">
+              <a:rPr lang="en-US" sz="1400" b="1" dirty="0">
                 <a:solidFill>
                   <a:srgbClr val="FF3B30"/>
                 </a:solidFill>
@@ -12548,9 +12548,9 @@
                 <a:ea typeface="Calibri" pitchFamily="34" charset="-122"/>
                 <a:cs typeface="Calibri" pitchFamily="34" charset="-120"/>
               </a:rPr>
-              <a:t>A claim we withdrew</a:t>
-            </a:r>
-            <a:endParaRPr lang="en-US" sz="1500" dirty="0"/>
+              <a:t>A claim we withdrew — then verified for real</a:t>
+            </a:r>
+            <a:endParaRPr lang="en-US" sz="1400" dirty="0"/>
           </a:p>
         </p:txBody>
       </p:sp>
@@ -12587,7 +12587,7 @@
                 <a:ea typeface="Calibri" pitchFamily="34" charset="-122"/>
                 <a:cs typeface="Calibri" pitchFamily="34" charset="-120"/>
               </a:rPr>
-              <a:t>The earlier report claimed NOSE’s CVE references were "verified, not hallucinated." Reading the deployed function directly shows it has no NVD lookup — it’s pure LLM generation.</a:t>
+              <a:t>An earlier report claimed NOSE’s CVEs were "verified, not hallucinated." The deployed function has no NVD lookup — it’s pure LLM generation, so that claim was withdrawn.</a:t>
             </a:r>
             <a:endParaRPr lang="en-US" sz="1200" dirty="0"/>
           </a:p>
@@ -12602,7 +12602,7 @@
         <p:spPr>
           <a:xfrm>
             <a:off x="6446520" y="3337560"/>
-            <a:ext cx="4846320" cy="777240"/>
+            <a:ext cx="4846320" cy="868680"/>
           </a:xfrm>
           <a:prstGeom prst="rect">
             <a:avLst/>
@@ -12626,7 +12626,7 @@
                 <a:ea typeface="Calibri" pitchFamily="34" charset="-122"/>
                 <a:cs typeface="Calibri" pitchFamily="34" charset="-120"/>
               </a:rPr>
-              <a:t>CVE-2023-1389 (the TP-Link example) is real — but that reflects the model’s training data on a famous CVE, not a verification mechanism.</a:t>
+              <a:t>We then spot-checked 3 of the 12 CVEs the live test above returned against public NVD sources: 1 correct, 2 real-but-misattributed, 1 not found anywhere — likely fabricated.</a:t>
             </a:r>
             <a:endParaRPr lang="en-US" sz="1200" dirty="0"/>
           </a:p>
@@ -12640,7 +12640,7 @@
         </p:nvSpPr>
         <p:spPr>
           <a:xfrm>
-            <a:off x="6446520" y="4206240"/>
+            <a:off x="6446520" y="4297680"/>
             <a:ext cx="4846320" cy="0"/>
           </a:xfrm>
           <a:prstGeom prst="line">
@@ -12663,8 +12663,8 @@
         </p:nvSpPr>
         <p:spPr>
           <a:xfrm>
-            <a:off x="6446520" y="4343400"/>
-            <a:ext cx="4846320" cy="777240"/>
+            <a:off x="6446520" y="4434840"/>
+            <a:ext cx="4846320" cy="685800"/>
           </a:xfrm>
           <a:prstGeom prst="rect">
             <a:avLst/>
@@ -12688,7 +12688,7 @@
                 <a:ea typeface="Calibri" pitchFamily="34" charset="-122"/>
                 <a:cs typeface="Calibri" pitchFamily="34" charset="-120"/>
               </a:rPr>
-              <a:t>This report names it as a limitation and specifies the fix: server-side NVD/CIRCL cross-referencing before a CVE is returned.</a:t>
+              <a:t>That mixed result is the fix: server-side NVD/CIRCL cross-referencing before any CVE is returned to a user remains the priority.</a:t>
             </a:r>
             <a:endParaRPr lang="en-US" sz="1200" dirty="0"/>
           </a:p>
@@ -12845,7 +12845,7 @@
       </p:sp>
       <p:pic>
         <p:nvPicPr>
-          <p:cNvPr id="4" name="Image 0" descr="/home/user/DOBERMAN-/.eval-scripts/pptx-build/shots/12-breach-result.png">    </p:cNvPr>
+          <p:cNvPr id="4" name="Image 0" descr="/home/user/DOBERMAN-/.eval-scripts/pptx-build/shots/real-12-breach-password.png">    </p:cNvPr>
           <p:cNvPicPr>
             <a:picLocks noChangeAspect="1"/>
           </p:cNvPicPr>
@@ -12986,7 +12986,7 @@
                 <a:ea typeface="Calibri" pitchFamily="34" charset="-122"/>
                 <a:cs typeface="Calibri" pitchFamily="34" charset="-120"/>
               </a:rPr>
-              <a:t>SHA-1 hashed locally, only a 5-character prefix sent to Pwned Passwords — the full password never leaves the function.</a:t>
+              <a:t>SHA-1 hashed locally, only a 5-character prefix sent to Pwned Passwords. Live test: 3,196 real breach occurrences returned.</a:t>
             </a:r>
             <a:endParaRPr lang="en-US" sz="1100" dirty="0"/>
           </a:p>
@@ -13088,7 +13088,7 @@
                 <a:ea typeface="Calibri" pitchFamily="34" charset="-122"/>
                 <a:cs typeface="Calibri" pitchFamily="34" charset="-120"/>
               </a:rPr>
-              <a:t>Called when a key is configured — returns real breach names, dates, and exposed data classes.</a:t>
+              <a:t>Called when a key is configured — a real historical row returned a genuine "not breached" verdict.</a:t>
             </a:r>
             <a:endParaRPr lang="en-US" sz="1100" dirty="0"/>
           </a:p>
@@ -13229,7 +13229,7 @@
                 <a:ea typeface="Courier New" pitchFamily="34" charset="-122"/>
                 <a:cs typeface="Courier New" pitchFamily="34" charset="-120"/>
               </a:rPr>
-              <a:t>Simulated result shown — HIBP unreachable from this sandbox</a:t>
+              <a:t>Real live result — genuine password breach lookup, shown above</a:t>
             </a:r>
             <a:endParaRPr lang="en-US" sz="900" dirty="0"/>
           </a:p>
